--- a/builder/assets/reference-pages/composition-shift.pptx
+++ b/builder/assets/reference-pages/composition-shift.pptx
@@ -1099,7 +1099,7 @@
                   <a:srgbClr val="15375F"/>
                 </a:solidFill>
               </a:rPr>
-              <a:t>收入结构持续向核心产品集中，2022—2025年占比提升15个百分点</a:t>
+              <a:t>The revenue structure continues to focus on core products.2022—2025Increase in annual share15percentage points</a:t>
             </a:r>
           </a:p>
         </p:txBody>
@@ -1632,7 +1632,7 @@
                   <a:srgbClr val="E8872D"/>
                 </a:solidFill>
               </a:rPr>
-              <a:t>核心产品</a:t>
+              <a:t>core products</a:t>
             </a:r>
           </a:p>
         </p:txBody>
@@ -1717,7 +1717,7 @@
                   <a:srgbClr val="172033"/>
                 </a:solidFill>
               </a:rPr>
-              <a:t>增值服务</a:t>
+              <a:t>value-added services</a:t>
             </a:r>
           </a:p>
         </p:txBody>
@@ -1802,7 +1802,7 @@
                   <a:srgbClr val="172033"/>
                 </a:solidFill>
               </a:rPr>
-              <a:t>实施服务</a:t>
+              <a:t>Implementation services</a:t>
             </a:r>
           </a:p>
         </p:txBody>
@@ -1887,7 +1887,7 @@
                   <a:srgbClr val="172033"/>
                 </a:solidFill>
               </a:rPr>
-              <a:t>其他</a:t>
+              <a:t>Others</a:t>
             </a:r>
           </a:p>
         </p:txBody>
@@ -3351,7 +3351,7 @@
                   <a:srgbClr val="697386"/>
                 </a:solidFill>
               </a:rPr>
-              <a:t>分母：当年确认收入</a:t>
+              <a:t>Denominator: Revenue recognized during the year</a:t>
             </a:r>
           </a:p>
         </p:txBody>
@@ -3403,14 +3403,14 @@
                   <a:srgbClr val="E8872D"/>
                 </a:solidFill>
               </a:rPr>
-              <a:t>合成示例数据，非真实客户数据</a:t>
+              <a:t>Synthetic sample data, not real customer data</a:t>
             </a:r>
           </a:p>
         </p:txBody>
       </p:sp>
       <p:sp>
         <p:nvSpPr>
-          <p:cNvPr id="56" name="关键洞察-rail">
+          <p:cNvPr id="56" name="key insights-rail">
             <a:extLst xmlns:a="http://schemas.openxmlformats.org/drawingml/2006/main">
               <a:ext uri="{FF2B5EF4-FFF2-40B4-BE49-F238E27FC236}">
                 <a16:creationId xmlns:a16="http://schemas.microsoft.com/office/drawing/2014/main" id="{7581D896-E13D-4B65-96D3-8B4DBB84484F}"/>
@@ -3443,7 +3443,7 @@
       </p:sp>
       <p:sp>
         <p:nvSpPr>
-          <p:cNvPr id="57" name="关键洞察-title">
+          <p:cNvPr id="57" name="key insights-title">
             <a:extLst xmlns:a="http://schemas.openxmlformats.org/drawingml/2006/main">
               <a:ext uri="{FF2B5EF4-FFF2-40B4-BE49-F238E27FC236}">
                 <a16:creationId xmlns:a16="http://schemas.microsoft.com/office/drawing/2014/main" id="{5DACF290-9990-499D-803B-117995A023C5}"/>
@@ -3488,14 +3488,14 @@
                   <a:srgbClr val="15375F"/>
                 </a:solidFill>
               </a:rPr>
-              <a:t>关键洞察</a:t>
+              <a:t>key insights</a:t>
             </a:r>
           </a:p>
         </p:txBody>
       </p:sp>
       <p:sp>
         <p:nvSpPr>
-          <p:cNvPr id="58" name="关键洞察-item-1">
+          <p:cNvPr id="58" name="key insights-item-1">
             <a:extLst xmlns:a="http://schemas.openxmlformats.org/drawingml/2006/main">
               <a:ext uri="{FF2B5EF4-FFF2-40B4-BE49-F238E27FC236}">
                 <a16:creationId xmlns:a16="http://schemas.microsoft.com/office/drawing/2014/main" id="{7CBCC638-5AE8-4CFD-A5A3-C7E4F20C9DE7}"/>
@@ -3544,14 +3544,14 @@
                   <a:srgbClr val="172033"/>
                 </a:solidFill>
               </a:rPr>
-              <a:t>核心产品占比连续三个年度提升，是结构变化的主要来源</a:t>
+              <a:t>The proportion of core products has increased for three consecutive years, which is the main source of structural changes.</a:t>
             </a:r>
           </a:p>
         </p:txBody>
       </p:sp>
       <p:sp>
         <p:nvSpPr>
-          <p:cNvPr id="59" name="关键洞察-item-2">
+          <p:cNvPr id="59" name="key insights-item-2">
             <a:extLst xmlns:a="http://schemas.openxmlformats.org/drawingml/2006/main">
               <a:ext uri="{FF2B5EF4-FFF2-40B4-BE49-F238E27FC236}">
                 <a16:creationId xmlns:a16="http://schemas.microsoft.com/office/drawing/2014/main" id="{165CD594-AB2F-4898-B008-610E8B1B6322}"/>
@@ -3600,7 +3600,7 @@
                   <a:srgbClr val="172033"/>
                 </a:solidFill>
               </a:rPr>
-              <a:t>实施服务占比由20%降至11%，人力交付依赖下降</a:t>
+              <a:t>The proportion of implementation services is composed of20%down to11%, dependence on human delivery decreases</a:t>
             </a:r>
           </a:p>
         </p:txBody>
@@ -3656,7 +3656,7 @@
                   <a:srgbClr val="15375F"/>
                 </a:solidFill>
               </a:rPr>
-              <a:t>结论：继续提高产品化收入，同时监控增值服务的增长质量</a:t>
+              <a:t>Conclusion: Continue to increase productization revenue while monitoring the quality of growth in value-added services</a:t>
             </a:r>
           </a:p>
         </p:txBody>
